--- a/MyRhythm_Productivity_Investor_Deck_v2.pptx
+++ b/MyRhythm_Productivity_Investor_Deck_v2.pptx
@@ -2669,6 +2669,41 @@
           </a:p>
         </p:txBody>
       </p:sp>
+      <p:sp>
+        <p:nvSpPr>
+          <p:cNvPr id="10" name="TextBox 9"/>
+          <p:cNvSpPr txBox="1"/>
+          <p:nvPr/>
+        </p:nvSpPr>
+        <p:spPr>
+          <a:xfrm>
+            <a:off x="457200" y="4777740"/>
+            <a:ext cx="8229600" cy="274320"/>
+          </a:xfrm>
+          <a:prstGeom prst="rect">
+            <a:avLst/>
+          </a:prstGeom>
+          <a:noFill/>
+        </p:spPr>
+        <p:txBody>
+          <a:bodyPr wrap="square">
+            <a:spAutoFit/>
+          </a:bodyPr>
+          <a:lstStyle/>
+          <a:p>
+            <a:pPr algn="ctr">
+              <a:defRPr sz="600" i="1">
+                <a:solidFill>
+                  <a:srgbClr val="888888"/>
+                </a:solidFill>
+              </a:defRPr>
+            </a:pPr>
+            <a:r>
+              <a:t>Confidential – Not for Distribution  |  © 2026 Annabel Aaron. All rights reserved.</a:t>
+            </a:r>
+          </a:p>
+        </p:txBody>
+      </p:sp>
     </p:spTree>
   </p:cSld>
   <p:clrMapOvr>
@@ -3733,6 +3768,41 @@
           </a:p>
         </p:txBody>
       </p:sp>
+      <p:sp>
+        <p:nvSpPr>
+          <p:cNvPr id="31" name="TextBox 30"/>
+          <p:cNvSpPr txBox="1"/>
+          <p:nvPr/>
+        </p:nvSpPr>
+        <p:spPr>
+          <a:xfrm>
+            <a:off x="457200" y="4777740"/>
+            <a:ext cx="8229600" cy="274320"/>
+          </a:xfrm>
+          <a:prstGeom prst="rect">
+            <a:avLst/>
+          </a:prstGeom>
+          <a:noFill/>
+        </p:spPr>
+        <p:txBody>
+          <a:bodyPr wrap="square">
+            <a:spAutoFit/>
+          </a:bodyPr>
+          <a:lstStyle/>
+          <a:p>
+            <a:pPr algn="ctr">
+              <a:defRPr sz="600" i="1">
+                <a:solidFill>
+                  <a:srgbClr val="888888"/>
+                </a:solidFill>
+              </a:defRPr>
+            </a:pPr>
+            <a:r>
+              <a:t>Confidential – Not for Distribution  |  © 2026 Annabel Aaron. All rights reserved.</a:t>
+            </a:r>
+          </a:p>
+        </p:txBody>
+      </p:sp>
     </p:spTree>
   </p:cSld>
   <p:clrMapOvr>
@@ -4221,6 +4291,41 @@
           </a:p>
         </p:txBody>
       </p:sp>
+      <p:sp>
+        <p:nvSpPr>
+          <p:cNvPr id="14" name="TextBox 13"/>
+          <p:cNvSpPr txBox="1"/>
+          <p:nvPr/>
+        </p:nvSpPr>
+        <p:spPr>
+          <a:xfrm>
+            <a:off x="457200" y="4777740"/>
+            <a:ext cx="8229600" cy="274320"/>
+          </a:xfrm>
+          <a:prstGeom prst="rect">
+            <a:avLst/>
+          </a:prstGeom>
+          <a:noFill/>
+        </p:spPr>
+        <p:txBody>
+          <a:bodyPr wrap="square">
+            <a:spAutoFit/>
+          </a:bodyPr>
+          <a:lstStyle/>
+          <a:p>
+            <a:pPr algn="ctr">
+              <a:defRPr sz="600" i="1">
+                <a:solidFill>
+                  <a:srgbClr val="888888"/>
+                </a:solidFill>
+              </a:defRPr>
+            </a:pPr>
+            <a:r>
+              <a:t>Confidential – Not for Distribution  |  © 2026 Annabel Aaron. All rights reserved.</a:t>
+            </a:r>
+          </a:p>
+        </p:txBody>
+      </p:sp>
     </p:spTree>
   </p:cSld>
   <p:clrMapOvr>
@@ -4669,6 +4774,41 @@
           </a:p>
         </p:txBody>
       </p:sp>
+      <p:sp>
+        <p:nvSpPr>
+          <p:cNvPr id="15" name="TextBox 14"/>
+          <p:cNvSpPr txBox="1"/>
+          <p:nvPr/>
+        </p:nvSpPr>
+        <p:spPr>
+          <a:xfrm>
+            <a:off x="457200" y="4777740"/>
+            <a:ext cx="8229600" cy="274320"/>
+          </a:xfrm>
+          <a:prstGeom prst="rect">
+            <a:avLst/>
+          </a:prstGeom>
+          <a:noFill/>
+        </p:spPr>
+        <p:txBody>
+          <a:bodyPr wrap="square">
+            <a:spAutoFit/>
+          </a:bodyPr>
+          <a:lstStyle/>
+          <a:p>
+            <a:pPr algn="ctr">
+              <a:defRPr sz="600" i="1">
+                <a:solidFill>
+                  <a:srgbClr val="888888"/>
+                </a:solidFill>
+              </a:defRPr>
+            </a:pPr>
+            <a:r>
+              <a:t>Confidential – Not for Distribution  |  © 2026 Annabel Aaron. All rights reserved.</a:t>
+            </a:r>
+          </a:p>
+        </p:txBody>
+      </p:sp>
     </p:spTree>
   </p:cSld>
   <p:clrMapOvr>
@@ -5585,6 +5725,41 @@
           </a:p>
         </p:txBody>
       </p:sp>
+      <p:sp>
+        <p:nvSpPr>
+          <p:cNvPr id="26" name="TextBox 25"/>
+          <p:cNvSpPr txBox="1"/>
+          <p:nvPr/>
+        </p:nvSpPr>
+        <p:spPr>
+          <a:xfrm>
+            <a:off x="457200" y="4777740"/>
+            <a:ext cx="8229600" cy="274320"/>
+          </a:xfrm>
+          <a:prstGeom prst="rect">
+            <a:avLst/>
+          </a:prstGeom>
+          <a:noFill/>
+        </p:spPr>
+        <p:txBody>
+          <a:bodyPr wrap="square">
+            <a:spAutoFit/>
+          </a:bodyPr>
+          <a:lstStyle/>
+          <a:p>
+            <a:pPr algn="ctr">
+              <a:defRPr sz="600" i="1">
+                <a:solidFill>
+                  <a:srgbClr val="888888"/>
+                </a:solidFill>
+              </a:defRPr>
+            </a:pPr>
+            <a:r>
+              <a:t>Confidential – Not for Distribution  |  © 2026 Annabel Aaron. All rights reserved.</a:t>
+            </a:r>
+          </a:p>
+        </p:txBody>
+      </p:sp>
     </p:spTree>
   </p:cSld>
   <p:clrMapOvr>
@@ -6434,6 +6609,41 @@
           </a:p>
         </p:txBody>
       </p:sp>
+      <p:sp>
+        <p:nvSpPr>
+          <p:cNvPr id="25" name="TextBox 24"/>
+          <p:cNvSpPr txBox="1"/>
+          <p:nvPr/>
+        </p:nvSpPr>
+        <p:spPr>
+          <a:xfrm>
+            <a:off x="457200" y="4777740"/>
+            <a:ext cx="8229600" cy="274320"/>
+          </a:xfrm>
+          <a:prstGeom prst="rect">
+            <a:avLst/>
+          </a:prstGeom>
+          <a:noFill/>
+        </p:spPr>
+        <p:txBody>
+          <a:bodyPr wrap="square">
+            <a:spAutoFit/>
+          </a:bodyPr>
+          <a:lstStyle/>
+          <a:p>
+            <a:pPr algn="ctr">
+              <a:defRPr sz="600" i="1">
+                <a:solidFill>
+                  <a:srgbClr val="888888"/>
+                </a:solidFill>
+              </a:defRPr>
+            </a:pPr>
+            <a:r>
+              <a:t>Confidential – Not for Distribution  |  © 2026 Annabel Aaron. All rights reserved.</a:t>
+            </a:r>
+          </a:p>
+        </p:txBody>
+      </p:sp>
     </p:spTree>
   </p:cSld>
   <p:clrMapOvr>
@@ -7281,6 +7491,41 @@
           </a:p>
         </p:txBody>
       </p:sp>
+      <p:sp>
+        <p:nvSpPr>
+          <p:cNvPr id="26" name="TextBox 25"/>
+          <p:cNvSpPr txBox="1"/>
+          <p:nvPr/>
+        </p:nvSpPr>
+        <p:spPr>
+          <a:xfrm>
+            <a:off x="457200" y="4777740"/>
+            <a:ext cx="8229600" cy="274320"/>
+          </a:xfrm>
+          <a:prstGeom prst="rect">
+            <a:avLst/>
+          </a:prstGeom>
+          <a:noFill/>
+        </p:spPr>
+        <p:txBody>
+          <a:bodyPr wrap="square">
+            <a:spAutoFit/>
+          </a:bodyPr>
+          <a:lstStyle/>
+          <a:p>
+            <a:pPr algn="ctr">
+              <a:defRPr sz="600" i="1">
+                <a:solidFill>
+                  <a:srgbClr val="888888"/>
+                </a:solidFill>
+              </a:defRPr>
+            </a:pPr>
+            <a:r>
+              <a:t>Confidential – Not for Distribution  |  © 2026 Annabel Aaron. All rights reserved.</a:t>
+            </a:r>
+          </a:p>
+        </p:txBody>
+      </p:sp>
     </p:spTree>
   </p:cSld>
   <p:clrMapOvr>
@@ -8409,6 +8654,41 @@
           </a:p>
         </p:txBody>
       </p:sp>
+      <p:sp>
+        <p:nvSpPr>
+          <p:cNvPr id="34" name="TextBox 33"/>
+          <p:cNvSpPr txBox="1"/>
+          <p:nvPr/>
+        </p:nvSpPr>
+        <p:spPr>
+          <a:xfrm>
+            <a:off x="457200" y="4777740"/>
+            <a:ext cx="8229600" cy="274320"/>
+          </a:xfrm>
+          <a:prstGeom prst="rect">
+            <a:avLst/>
+          </a:prstGeom>
+          <a:noFill/>
+        </p:spPr>
+        <p:txBody>
+          <a:bodyPr wrap="square">
+            <a:spAutoFit/>
+          </a:bodyPr>
+          <a:lstStyle/>
+          <a:p>
+            <a:pPr algn="ctr">
+              <a:defRPr sz="600" i="1">
+                <a:solidFill>
+                  <a:srgbClr val="888888"/>
+                </a:solidFill>
+              </a:defRPr>
+            </a:pPr>
+            <a:r>
+              <a:t>Confidential – Not for Distribution  |  © 2026 Annabel Aaron. All rights reserved.</a:t>
+            </a:r>
+          </a:p>
+        </p:txBody>
+      </p:sp>
     </p:spTree>
   </p:cSld>
   <p:clrMapOvr>
@@ -8910,6 +9190,41 @@
           </a:p>
         </p:txBody>
       </p:sp>
+      <p:sp>
+        <p:nvSpPr>
+          <p:cNvPr id="15" name="TextBox 14"/>
+          <p:cNvSpPr txBox="1"/>
+          <p:nvPr/>
+        </p:nvSpPr>
+        <p:spPr>
+          <a:xfrm>
+            <a:off x="457200" y="4777740"/>
+            <a:ext cx="8229600" cy="274320"/>
+          </a:xfrm>
+          <a:prstGeom prst="rect">
+            <a:avLst/>
+          </a:prstGeom>
+          <a:noFill/>
+        </p:spPr>
+        <p:txBody>
+          <a:bodyPr wrap="square">
+            <a:spAutoFit/>
+          </a:bodyPr>
+          <a:lstStyle/>
+          <a:p>
+            <a:pPr algn="ctr">
+              <a:defRPr sz="600" i="1">
+                <a:solidFill>
+                  <a:srgbClr val="888888"/>
+                </a:solidFill>
+              </a:defRPr>
+            </a:pPr>
+            <a:r>
+              <a:t>Confidential – Not for Distribution  |  © 2026 Annabel Aaron. All rights reserved.</a:t>
+            </a:r>
+          </a:p>
+        </p:txBody>
+      </p:sp>
     </p:spTree>
   </p:cSld>
   <p:clrMapOvr>
@@ -10160,6 +10475,41 @@
           </a:p>
         </p:txBody>
       </p:sp>
+      <p:sp>
+        <p:nvSpPr>
+          <p:cNvPr id="33" name="TextBox 32"/>
+          <p:cNvSpPr txBox="1"/>
+          <p:nvPr/>
+        </p:nvSpPr>
+        <p:spPr>
+          <a:xfrm>
+            <a:off x="457200" y="4777740"/>
+            <a:ext cx="8229600" cy="274320"/>
+          </a:xfrm>
+          <a:prstGeom prst="rect">
+            <a:avLst/>
+          </a:prstGeom>
+          <a:noFill/>
+        </p:spPr>
+        <p:txBody>
+          <a:bodyPr wrap="square">
+            <a:spAutoFit/>
+          </a:bodyPr>
+          <a:lstStyle/>
+          <a:p>
+            <a:pPr algn="ctr">
+              <a:defRPr sz="600" i="1">
+                <a:solidFill>
+                  <a:srgbClr val="888888"/>
+                </a:solidFill>
+              </a:defRPr>
+            </a:pPr>
+            <a:r>
+              <a:t>Confidential – Not for Distribution  |  © 2026 Annabel Aaron. All rights reserved.</a:t>
+            </a:r>
+          </a:p>
+        </p:txBody>
+      </p:sp>
     </p:spTree>
   </p:cSld>
   <p:clrMapOvr>
@@ -10575,6 +10925,41 @@
           </a:p>
         </p:txBody>
       </p:sp>
+      <p:sp>
+        <p:nvSpPr>
+          <p:cNvPr id="11" name="TextBox 10"/>
+          <p:cNvSpPr txBox="1"/>
+          <p:nvPr/>
+        </p:nvSpPr>
+        <p:spPr>
+          <a:xfrm>
+            <a:off x="457200" y="4777740"/>
+            <a:ext cx="8229600" cy="274320"/>
+          </a:xfrm>
+          <a:prstGeom prst="rect">
+            <a:avLst/>
+          </a:prstGeom>
+          <a:noFill/>
+        </p:spPr>
+        <p:txBody>
+          <a:bodyPr wrap="square">
+            <a:spAutoFit/>
+          </a:bodyPr>
+          <a:lstStyle/>
+          <a:p>
+            <a:pPr algn="ctr">
+              <a:defRPr sz="600" i="1">
+                <a:solidFill>
+                  <a:srgbClr val="888888"/>
+                </a:solidFill>
+              </a:defRPr>
+            </a:pPr>
+            <a:r>
+              <a:t>Confidential – Not for Distribution  |  © 2026 Annabel Aaron. All rights reserved.</a:t>
+            </a:r>
+          </a:p>
+        </p:txBody>
+      </p:sp>
     </p:spTree>
   </p:cSld>
   <p:clrMapOvr>
@@ -11308,6 +11693,41 @@
           </a:p>
         </p:txBody>
       </p:sp>
+      <p:sp>
+        <p:nvSpPr>
+          <p:cNvPr id="19" name="TextBox 18"/>
+          <p:cNvSpPr txBox="1"/>
+          <p:nvPr/>
+        </p:nvSpPr>
+        <p:spPr>
+          <a:xfrm>
+            <a:off x="457200" y="4777740"/>
+            <a:ext cx="8229600" cy="274320"/>
+          </a:xfrm>
+          <a:prstGeom prst="rect">
+            <a:avLst/>
+          </a:prstGeom>
+          <a:noFill/>
+        </p:spPr>
+        <p:txBody>
+          <a:bodyPr wrap="square">
+            <a:spAutoFit/>
+          </a:bodyPr>
+          <a:lstStyle/>
+          <a:p>
+            <a:pPr algn="ctr">
+              <a:defRPr sz="600" i="1">
+                <a:solidFill>
+                  <a:srgbClr val="888888"/>
+                </a:solidFill>
+              </a:defRPr>
+            </a:pPr>
+            <a:r>
+              <a:t>Confidential – Not for Distribution  |  © 2026 Annabel Aaron. All rights reserved.</a:t>
+            </a:r>
+          </a:p>
+        </p:txBody>
+      </p:sp>
     </p:spTree>
   </p:cSld>
   <p:clrMapOvr>
@@ -11523,6 +11943,41 @@
           </a:p>
         </p:txBody>
       </p:sp>
+      <p:sp>
+        <p:nvSpPr>
+          <p:cNvPr id="7" name="TextBox 6"/>
+          <p:cNvSpPr txBox="1"/>
+          <p:nvPr/>
+        </p:nvSpPr>
+        <p:spPr>
+          <a:xfrm>
+            <a:off x="457200" y="4777740"/>
+            <a:ext cx="8229600" cy="274320"/>
+          </a:xfrm>
+          <a:prstGeom prst="rect">
+            <a:avLst/>
+          </a:prstGeom>
+          <a:noFill/>
+        </p:spPr>
+        <p:txBody>
+          <a:bodyPr wrap="square">
+            <a:spAutoFit/>
+          </a:bodyPr>
+          <a:lstStyle/>
+          <a:p>
+            <a:pPr algn="ctr">
+              <a:defRPr sz="600" i="1">
+                <a:solidFill>
+                  <a:srgbClr val="888888"/>
+                </a:solidFill>
+              </a:defRPr>
+            </a:pPr>
+            <a:r>
+              <a:t>Confidential – Not for Distribution  |  © 2026 Annabel Aaron. All rights reserved.</a:t>
+            </a:r>
+          </a:p>
+        </p:txBody>
+      </p:sp>
     </p:spTree>
   </p:cSld>
   <p:clrMapOvr>
@@ -12517,6 +12972,41 @@
           </a:p>
         </p:txBody>
       </p:sp>
+      <p:sp>
+        <p:nvSpPr>
+          <p:cNvPr id="29" name="TextBox 28"/>
+          <p:cNvSpPr txBox="1"/>
+          <p:nvPr/>
+        </p:nvSpPr>
+        <p:spPr>
+          <a:xfrm>
+            <a:off x="457200" y="4777740"/>
+            <a:ext cx="8229600" cy="274320"/>
+          </a:xfrm>
+          <a:prstGeom prst="rect">
+            <a:avLst/>
+          </a:prstGeom>
+          <a:noFill/>
+        </p:spPr>
+        <p:txBody>
+          <a:bodyPr wrap="square">
+            <a:spAutoFit/>
+          </a:bodyPr>
+          <a:lstStyle/>
+          <a:p>
+            <a:pPr algn="ctr">
+              <a:defRPr sz="600" i="1">
+                <a:solidFill>
+                  <a:srgbClr val="888888"/>
+                </a:solidFill>
+              </a:defRPr>
+            </a:pPr>
+            <a:r>
+              <a:t>Confidential – Not for Distribution  |  © 2026 Annabel Aaron. All rights reserved.</a:t>
+            </a:r>
+          </a:p>
+        </p:txBody>
+      </p:sp>
     </p:spTree>
   </p:cSld>
   <p:clrMapOvr>
@@ -13389,6 +13879,41 @@
           </a:p>
         </p:txBody>
       </p:sp>
+      <p:sp>
+        <p:nvSpPr>
+          <p:cNvPr id="25" name="TextBox 24"/>
+          <p:cNvSpPr txBox="1"/>
+          <p:nvPr/>
+        </p:nvSpPr>
+        <p:spPr>
+          <a:xfrm>
+            <a:off x="457200" y="4777740"/>
+            <a:ext cx="8229600" cy="274320"/>
+          </a:xfrm>
+          <a:prstGeom prst="rect">
+            <a:avLst/>
+          </a:prstGeom>
+          <a:noFill/>
+        </p:spPr>
+        <p:txBody>
+          <a:bodyPr wrap="square">
+            <a:spAutoFit/>
+          </a:bodyPr>
+          <a:lstStyle/>
+          <a:p>
+            <a:pPr algn="ctr">
+              <a:defRPr sz="600" i="1">
+                <a:solidFill>
+                  <a:srgbClr val="888888"/>
+                </a:solidFill>
+              </a:defRPr>
+            </a:pPr>
+            <a:r>
+              <a:t>Confidential – Not for Distribution  |  © 2026 Annabel Aaron. All rights reserved.</a:t>
+            </a:r>
+          </a:p>
+        </p:txBody>
+      </p:sp>
     </p:spTree>
   </p:cSld>
   <p:clrMapOvr>
@@ -13646,6 +14171,41 @@
           </a:p>
         </p:txBody>
       </p:sp>
+      <p:sp>
+        <p:nvSpPr>
+          <p:cNvPr id="8" name="TextBox 7"/>
+          <p:cNvSpPr txBox="1"/>
+          <p:nvPr/>
+        </p:nvSpPr>
+        <p:spPr>
+          <a:xfrm>
+            <a:off x="457200" y="4777740"/>
+            <a:ext cx="8229600" cy="274320"/>
+          </a:xfrm>
+          <a:prstGeom prst="rect">
+            <a:avLst/>
+          </a:prstGeom>
+          <a:noFill/>
+        </p:spPr>
+        <p:txBody>
+          <a:bodyPr wrap="square">
+            <a:spAutoFit/>
+          </a:bodyPr>
+          <a:lstStyle/>
+          <a:p>
+            <a:pPr algn="ctr">
+              <a:defRPr sz="600" i="1">
+                <a:solidFill>
+                  <a:srgbClr val="888888"/>
+                </a:solidFill>
+              </a:defRPr>
+            </a:pPr>
+            <a:r>
+              <a:t>Confidential – Not for Distribution  |  © 2026 Annabel Aaron. All rights reserved.</a:t>
+            </a:r>
+          </a:p>
+        </p:txBody>
+      </p:sp>
     </p:spTree>
   </p:cSld>
   <p:clrMapOvr>
@@ -14392,6 +14952,41 @@
           </a:p>
         </p:txBody>
       </p:sp>
+      <p:sp>
+        <p:nvSpPr>
+          <p:cNvPr id="22" name="TextBox 21"/>
+          <p:cNvSpPr txBox="1"/>
+          <p:nvPr/>
+        </p:nvSpPr>
+        <p:spPr>
+          <a:xfrm>
+            <a:off x="457200" y="4777740"/>
+            <a:ext cx="8229600" cy="274320"/>
+          </a:xfrm>
+          <a:prstGeom prst="rect">
+            <a:avLst/>
+          </a:prstGeom>
+          <a:noFill/>
+        </p:spPr>
+        <p:txBody>
+          <a:bodyPr wrap="square">
+            <a:spAutoFit/>
+          </a:bodyPr>
+          <a:lstStyle/>
+          <a:p>
+            <a:pPr algn="ctr">
+              <a:defRPr sz="600" i="1">
+                <a:solidFill>
+                  <a:srgbClr val="888888"/>
+                </a:solidFill>
+              </a:defRPr>
+            </a:pPr>
+            <a:r>
+              <a:t>Confidential – Not for Distribution  |  © 2026 Annabel Aaron. All rights reserved.</a:t>
+            </a:r>
+          </a:p>
+        </p:txBody>
+      </p:sp>
     </p:spTree>
   </p:cSld>
   <p:clrMapOvr>
@@ -15050,6 +15645,41 @@
               <a:t>Every completion logged. Streaks tracked. Confidence compounds. The system proves you can be relied upon.</a:t>
             </a:r>
             <a:endParaRPr lang="en-US" sz="1100" dirty="0"/>
+          </a:p>
+        </p:txBody>
+      </p:sp>
+      <p:sp>
+        <p:nvSpPr>
+          <p:cNvPr id="20" name="TextBox 19"/>
+          <p:cNvSpPr txBox="1"/>
+          <p:nvPr/>
+        </p:nvSpPr>
+        <p:spPr>
+          <a:xfrm>
+            <a:off x="457200" y="4777740"/>
+            <a:ext cx="8229600" cy="274320"/>
+          </a:xfrm>
+          <a:prstGeom prst="rect">
+            <a:avLst/>
+          </a:prstGeom>
+          <a:noFill/>
+        </p:spPr>
+        <p:txBody>
+          <a:bodyPr wrap="square">
+            <a:spAutoFit/>
+          </a:bodyPr>
+          <a:lstStyle/>
+          <a:p>
+            <a:pPr algn="ctr">
+              <a:defRPr sz="600" i="1">
+                <a:solidFill>
+                  <a:srgbClr val="888888"/>
+                </a:solidFill>
+              </a:defRPr>
+            </a:pPr>
+            <a:r>
+              <a:t>Confidential – Not for Distribution  |  © 2026 Annabel Aaron. All rights reserved.</a:t>
+            </a:r>
           </a:p>
         </p:txBody>
       </p:sp>

--- a/MyRhythm_Productivity_Investor_Deck_v2.pptx
+++ b/MyRhythm_Productivity_Investor_Deck_v2.pptx
@@ -2407,6 +2407,10 @@
           </a:solidFill>
           <a:ln/>
         </p:spPr>
+        <p:txBody>
+          <a:bodyPr/>
+          <a:p/>
+        </p:txBody>
       </p:sp>
       <p:sp>
         <p:nvSpPr>
@@ -2427,6 +2431,10 @@
           </a:solidFill>
           <a:ln/>
         </p:spPr>
+        <p:txBody>
+          <a:bodyPr/>
+          <a:p/>
+        </p:txBody>
       </p:sp>
       <p:sp>
         <p:nvSpPr>
@@ -2551,6 +2559,10 @@
             <a:prstDash val="solid"/>
           </a:ln>
         </p:spPr>
+        <p:txBody>
+          <a:bodyPr/>
+          <a:p/>
+        </p:txBody>
       </p:sp>
       <p:sp>
         <p:nvSpPr>
@@ -2677,8 +2689,8 @@
         </p:nvSpPr>
         <p:spPr>
           <a:xfrm>
-            <a:off x="457200" y="4777740"/>
-            <a:ext cx="8229600" cy="274320"/>
+            <a:off x="457200" y="4869180"/>
+            <a:ext cx="8229600" cy="182880"/>
           </a:xfrm>
           <a:prstGeom prst="rect">
             <a:avLst/>
@@ -2694,7 +2706,7 @@
             <a:pPr algn="ctr">
               <a:defRPr sz="600" i="1">
                 <a:solidFill>
-                  <a:srgbClr val="888888"/>
+                  <a:srgbClr val="999999"/>
                 </a:solidFill>
               </a:defRPr>
             </a:pPr>
@@ -2833,6 +2845,10 @@
           </a:solidFill>
           <a:ln/>
         </p:spPr>
+        <p:txBody>
+          <a:bodyPr/>
+          <a:p/>
+        </p:txBody>
       </p:sp>
       <p:sp>
         <p:nvSpPr>
@@ -3012,6 +3028,10 @@
           </a:solidFill>
           <a:ln/>
         </p:spPr>
+        <p:txBody>
+          <a:bodyPr/>
+          <a:p/>
+        </p:txBody>
       </p:sp>
       <p:sp>
         <p:nvSpPr>
@@ -3191,6 +3211,10 @@
           </a:solidFill>
           <a:ln/>
         </p:spPr>
+        <p:txBody>
+          <a:bodyPr/>
+          <a:p/>
+        </p:txBody>
       </p:sp>
       <p:sp>
         <p:nvSpPr>
@@ -3370,6 +3394,10 @@
           </a:solidFill>
           <a:ln/>
         </p:spPr>
+        <p:txBody>
+          <a:bodyPr/>
+          <a:p/>
+        </p:txBody>
       </p:sp>
       <p:sp>
         <p:nvSpPr>
@@ -3549,6 +3577,10 @@
           </a:solidFill>
           <a:ln/>
         </p:spPr>
+        <p:txBody>
+          <a:bodyPr/>
+          <a:p/>
+        </p:txBody>
       </p:sp>
       <p:sp>
         <p:nvSpPr>
@@ -3728,6 +3760,10 @@
           </a:solidFill>
           <a:ln/>
         </p:spPr>
+        <p:txBody>
+          <a:bodyPr/>
+          <a:p/>
+        </p:txBody>
       </p:sp>
       <p:sp>
         <p:nvSpPr>
@@ -3776,8 +3812,8 @@
         </p:nvSpPr>
         <p:spPr>
           <a:xfrm>
-            <a:off x="457200" y="4777740"/>
-            <a:ext cx="8229600" cy="274320"/>
+            <a:off x="457200" y="4869180"/>
+            <a:ext cx="8229600" cy="182880"/>
           </a:xfrm>
           <a:prstGeom prst="rect">
             <a:avLst/>
@@ -3793,7 +3829,7 @@
             <a:pPr algn="ctr">
               <a:defRPr sz="600" i="1">
                 <a:solidFill>
-                  <a:srgbClr val="888888"/>
+                  <a:srgbClr val="999999"/>
                 </a:solidFill>
               </a:defRPr>
             </a:pPr>
@@ -3955,6 +3991,10 @@
           </a:solidFill>
           <a:ln/>
         </p:spPr>
+        <p:txBody>
+          <a:bodyPr/>
+          <a:p/>
+        </p:txBody>
       </p:sp>
       <p:sp>
         <p:nvSpPr>
@@ -3975,6 +4015,10 @@
           </a:solidFill>
           <a:ln/>
         </p:spPr>
+        <p:txBody>
+          <a:bodyPr/>
+          <a:p/>
+        </p:txBody>
       </p:sp>
       <p:sp>
         <p:nvSpPr>
@@ -4299,8 +4343,8 @@
         </p:nvSpPr>
         <p:spPr>
           <a:xfrm>
-            <a:off x="457200" y="4777740"/>
-            <a:ext cx="8229600" cy="274320"/>
+            <a:off x="457200" y="4869180"/>
+            <a:ext cx="8229600" cy="182880"/>
           </a:xfrm>
           <a:prstGeom prst="rect">
             <a:avLst/>
@@ -4316,7 +4360,7 @@
             <a:pPr algn="ctr">
               <a:defRPr sz="600" i="1">
                 <a:solidFill>
-                  <a:srgbClr val="888888"/>
+                  <a:srgbClr val="999999"/>
                 </a:solidFill>
               </a:defRPr>
             </a:pPr>
@@ -4517,6 +4561,10 @@
           </a:solidFill>
           <a:ln/>
         </p:spPr>
+        <p:txBody>
+          <a:bodyPr/>
+          <a:p/>
+        </p:txBody>
       </p:sp>
       <p:sp>
         <p:nvSpPr>
@@ -4537,6 +4585,10 @@
           </a:solidFill>
           <a:ln/>
         </p:spPr>
+        <p:txBody>
+          <a:bodyPr/>
+          <a:p/>
+        </p:txBody>
       </p:sp>
       <p:sp>
         <p:nvSpPr>
@@ -4557,6 +4609,10 @@
           </a:solidFill>
           <a:ln/>
         </p:spPr>
+        <p:txBody>
+          <a:bodyPr/>
+          <a:p/>
+        </p:txBody>
       </p:sp>
       <p:sp>
         <p:nvSpPr>
@@ -4577,6 +4633,10 @@
           </a:solidFill>
           <a:ln/>
         </p:spPr>
+        <p:txBody>
+          <a:bodyPr/>
+          <a:p/>
+        </p:txBody>
       </p:sp>
       <p:sp>
         <p:nvSpPr>
@@ -4597,6 +4657,10 @@
           </a:solidFill>
           <a:ln/>
         </p:spPr>
+        <p:txBody>
+          <a:bodyPr/>
+          <a:p/>
+        </p:txBody>
       </p:sp>
       <p:sp>
         <p:nvSpPr>
@@ -4617,6 +4681,10 @@
           </a:solidFill>
           <a:ln/>
         </p:spPr>
+        <p:txBody>
+          <a:bodyPr/>
+          <a:p/>
+        </p:txBody>
       </p:sp>
       <p:sp>
         <p:nvSpPr>
@@ -4782,8 +4850,8 @@
         </p:nvSpPr>
         <p:spPr>
           <a:xfrm>
-            <a:off x="457200" y="4777740"/>
-            <a:ext cx="8229600" cy="274320"/>
+            <a:off x="457200" y="4869180"/>
+            <a:ext cx="8229600" cy="182880"/>
           </a:xfrm>
           <a:prstGeom prst="rect">
             <a:avLst/>
@@ -4799,7 +4867,7 @@
             <a:pPr algn="ctr">
               <a:defRPr sz="600" i="1">
                 <a:solidFill>
-                  <a:srgbClr val="888888"/>
+                  <a:srgbClr val="999999"/>
                 </a:solidFill>
               </a:defRPr>
             </a:pPr>
@@ -5058,6 +5126,10 @@
             <a:prstDash val="solid"/>
           </a:ln>
         </p:spPr>
+        <p:txBody>
+          <a:bodyPr/>
+          <a:p/>
+        </p:txBody>
       </p:sp>
       <p:sp>
         <p:nvSpPr>
@@ -5198,6 +5270,10 @@
             <a:prstDash val="solid"/>
           </a:ln>
         </p:spPr>
+        <p:txBody>
+          <a:bodyPr/>
+          <a:p/>
+        </p:txBody>
       </p:sp>
       <p:sp>
         <p:nvSpPr>
@@ -5338,6 +5414,10 @@
             <a:prstDash val="solid"/>
           </a:ln>
         </p:spPr>
+        <p:txBody>
+          <a:bodyPr/>
+          <a:p/>
+        </p:txBody>
       </p:sp>
       <p:sp>
         <p:nvSpPr>
@@ -5478,6 +5558,10 @@
             <a:prstDash val="solid"/>
           </a:ln>
         </p:spPr>
+        <p:txBody>
+          <a:bodyPr/>
+          <a:p/>
+        </p:txBody>
       </p:sp>
       <p:sp>
         <p:nvSpPr>
@@ -5537,6 +5621,10 @@
           </a:solidFill>
           <a:ln/>
         </p:spPr>
+        <p:txBody>
+          <a:bodyPr/>
+          <a:p/>
+        </p:txBody>
       </p:sp>
       <p:sp>
         <p:nvSpPr>
@@ -5621,6 +5709,10 @@
           </a:solidFill>
           <a:ln/>
         </p:spPr>
+        <p:txBody>
+          <a:bodyPr/>
+          <a:p/>
+        </p:txBody>
       </p:sp>
       <p:sp>
         <p:nvSpPr>
@@ -5733,8 +5825,8 @@
         </p:nvSpPr>
         <p:spPr>
           <a:xfrm>
-            <a:off x="457200" y="4777740"/>
-            <a:ext cx="8229600" cy="274320"/>
+            <a:off x="457200" y="4869180"/>
+            <a:ext cx="8229600" cy="182880"/>
           </a:xfrm>
           <a:prstGeom prst="rect">
             <a:avLst/>
@@ -5750,7 +5842,7 @@
             <a:pPr algn="ctr">
               <a:defRPr sz="600" i="1">
                 <a:solidFill>
-                  <a:srgbClr val="888888"/>
+                  <a:srgbClr val="999999"/>
                 </a:solidFill>
               </a:defRPr>
             </a:pPr>
@@ -5889,6 +5981,10 @@
           </a:solidFill>
           <a:ln/>
         </p:spPr>
+        <p:txBody>
+          <a:bodyPr/>
+          <a:p/>
+        </p:txBody>
       </p:sp>
       <p:sp>
         <p:nvSpPr>
@@ -6029,6 +6125,10 @@
           </a:solidFill>
           <a:ln/>
         </p:spPr>
+        <p:txBody>
+          <a:bodyPr/>
+          <a:p/>
+        </p:txBody>
       </p:sp>
       <p:sp>
         <p:nvSpPr>
@@ -6169,6 +6269,10 @@
           </a:solidFill>
           <a:ln/>
         </p:spPr>
+        <p:txBody>
+          <a:bodyPr/>
+          <a:p/>
+        </p:txBody>
       </p:sp>
       <p:sp>
         <p:nvSpPr>
@@ -6309,6 +6413,10 @@
           </a:solidFill>
           <a:ln/>
         </p:spPr>
+        <p:txBody>
+          <a:bodyPr/>
+          <a:p/>
+        </p:txBody>
       </p:sp>
       <p:sp>
         <p:nvSpPr>
@@ -6449,6 +6557,10 @@
           </a:solidFill>
           <a:ln/>
         </p:spPr>
+        <p:txBody>
+          <a:bodyPr/>
+          <a:p/>
+        </p:txBody>
       </p:sp>
       <p:sp>
         <p:nvSpPr>
@@ -6617,8 +6729,8 @@
         </p:nvSpPr>
         <p:spPr>
           <a:xfrm>
-            <a:off x="457200" y="4777740"/>
-            <a:ext cx="8229600" cy="274320"/>
+            <a:off x="457200" y="4869180"/>
+            <a:ext cx="8229600" cy="182880"/>
           </a:xfrm>
           <a:prstGeom prst="rect">
             <a:avLst/>
@@ -6634,7 +6746,7 @@
             <a:pPr algn="ctr">
               <a:defRPr sz="600" i="1">
                 <a:solidFill>
-                  <a:srgbClr val="888888"/>
+                  <a:srgbClr val="999999"/>
                 </a:solidFill>
               </a:defRPr>
             </a:pPr>
@@ -6773,6 +6885,10 @@
           </a:solidFill>
           <a:ln/>
         </p:spPr>
+        <p:txBody>
+          <a:bodyPr/>
+          <a:p/>
+        </p:txBody>
       </p:sp>
       <p:sp>
         <p:nvSpPr>
@@ -6913,6 +7029,10 @@
           </a:solidFill>
           <a:ln/>
         </p:spPr>
+        <p:txBody>
+          <a:bodyPr/>
+          <a:p/>
+        </p:txBody>
       </p:sp>
       <p:sp>
         <p:nvSpPr>
@@ -7053,6 +7173,10 @@
           </a:solidFill>
           <a:ln/>
         </p:spPr>
+        <p:txBody>
+          <a:bodyPr/>
+          <a:p/>
+        </p:txBody>
       </p:sp>
       <p:sp>
         <p:nvSpPr>
@@ -7193,6 +7317,10 @@
           </a:solidFill>
           <a:ln/>
         </p:spPr>
+        <p:txBody>
+          <a:bodyPr/>
+          <a:p/>
+        </p:txBody>
       </p:sp>
       <p:sp>
         <p:nvSpPr>
@@ -7333,6 +7461,10 @@
           </a:solidFill>
           <a:ln/>
         </p:spPr>
+        <p:txBody>
+          <a:bodyPr/>
+          <a:p/>
+        </p:txBody>
       </p:sp>
       <p:sp>
         <p:nvSpPr>
@@ -7392,6 +7524,10 @@
           </a:solidFill>
           <a:ln/>
         </p:spPr>
+        <p:txBody>
+          <a:bodyPr/>
+          <a:p/>
+        </p:txBody>
       </p:sp>
       <p:sp>
         <p:nvSpPr>
@@ -7451,6 +7587,10 @@
           </a:solidFill>
           <a:ln/>
         </p:spPr>
+        <p:txBody>
+          <a:bodyPr/>
+          <a:p/>
+        </p:txBody>
       </p:sp>
       <p:sp>
         <p:nvSpPr>
@@ -7499,8 +7639,8 @@
         </p:nvSpPr>
         <p:spPr>
           <a:xfrm>
-            <a:off x="457200" y="4777740"/>
-            <a:ext cx="8229600" cy="274320"/>
+            <a:off x="457200" y="4869180"/>
+            <a:ext cx="8229600" cy="182880"/>
           </a:xfrm>
           <a:prstGeom prst="rect">
             <a:avLst/>
@@ -7516,7 +7656,7 @@
             <a:pPr algn="ctr">
               <a:defRPr sz="600" i="1">
                 <a:solidFill>
-                  <a:srgbClr val="888888"/>
+                  <a:srgbClr val="999999"/>
                 </a:solidFill>
               </a:defRPr>
             </a:pPr>
@@ -7733,6 +7873,10 @@
           </a:solidFill>
           <a:ln/>
         </p:spPr>
+        <p:txBody>
+          <a:bodyPr/>
+          <a:p/>
+        </p:txBody>
       </p:sp>
       <p:sp>
         <p:nvSpPr>
@@ -7870,6 +8014,10 @@
           </a:solidFill>
           <a:ln/>
         </p:spPr>
+        <p:txBody>
+          <a:bodyPr/>
+          <a:p/>
+        </p:txBody>
       </p:sp>
       <p:sp>
         <p:nvSpPr>
@@ -8007,6 +8155,10 @@
           </a:solidFill>
           <a:ln/>
         </p:spPr>
+        <p:txBody>
+          <a:bodyPr/>
+          <a:p/>
+        </p:txBody>
       </p:sp>
       <p:sp>
         <p:nvSpPr>
@@ -8183,6 +8335,10 @@
           </a:solidFill>
           <a:ln/>
         </p:spPr>
+        <p:txBody>
+          <a:bodyPr/>
+          <a:p/>
+        </p:txBody>
       </p:sp>
       <p:sp>
         <p:nvSpPr>
@@ -8281,6 +8437,10 @@
           </a:solidFill>
           <a:ln/>
         </p:spPr>
+        <p:txBody>
+          <a:bodyPr/>
+          <a:p/>
+        </p:txBody>
       </p:sp>
       <p:sp>
         <p:nvSpPr>
@@ -8379,6 +8539,10 @@
           </a:solidFill>
           <a:ln/>
         </p:spPr>
+        <p:txBody>
+          <a:bodyPr/>
+          <a:p/>
+        </p:txBody>
       </p:sp>
       <p:sp>
         <p:nvSpPr>
@@ -8477,6 +8641,10 @@
           </a:solidFill>
           <a:ln/>
         </p:spPr>
+        <p:txBody>
+          <a:bodyPr/>
+          <a:p/>
+        </p:txBody>
       </p:sp>
       <p:sp>
         <p:nvSpPr>
@@ -8575,6 +8743,10 @@
           </a:solidFill>
           <a:ln/>
         </p:spPr>
+        <p:txBody>
+          <a:bodyPr/>
+          <a:p/>
+        </p:txBody>
       </p:sp>
       <p:sp>
         <p:nvSpPr>
@@ -8662,8 +8834,8 @@
         </p:nvSpPr>
         <p:spPr>
           <a:xfrm>
-            <a:off x="457200" y="4777740"/>
-            <a:ext cx="8229600" cy="274320"/>
+            <a:off x="457200" y="4869180"/>
+            <a:ext cx="8229600" cy="182880"/>
           </a:xfrm>
           <a:prstGeom prst="rect">
             <a:avLst/>
@@ -8679,7 +8851,7 @@
             <a:pPr algn="ctr">
               <a:defRPr sz="600" i="1">
                 <a:solidFill>
-                  <a:srgbClr val="888888"/>
+                  <a:srgbClr val="999999"/>
                 </a:solidFill>
               </a:defRPr>
             </a:pPr>
@@ -8823,6 +8995,10 @@
             <a:prstDash val="solid"/>
           </a:ln>
         </p:spPr>
+        <p:txBody>
+          <a:bodyPr/>
+          <a:p/>
+        </p:txBody>
       </p:sp>
       <p:sp>
         <p:nvSpPr>
@@ -8929,6 +9105,10 @@
             <a:prstDash val="solid"/>
           </a:ln>
         </p:spPr>
+        <p:txBody>
+          <a:bodyPr/>
+          <a:p/>
+        </p:txBody>
       </p:sp>
       <p:sp>
         <p:nvSpPr>
@@ -9035,6 +9215,10 @@
             <a:prstDash val="solid"/>
           </a:ln>
         </p:spPr>
+        <p:txBody>
+          <a:bodyPr/>
+          <a:p/>
+        </p:txBody>
       </p:sp>
       <p:sp>
         <p:nvSpPr>
@@ -9136,6 +9320,10 @@
           </a:solidFill>
           <a:ln/>
         </p:spPr>
+        <p:txBody>
+          <a:bodyPr/>
+          <a:p/>
+        </p:txBody>
       </p:sp>
       <p:sp>
         <p:nvSpPr>
@@ -9198,8 +9386,8 @@
         </p:nvSpPr>
         <p:spPr>
           <a:xfrm>
-            <a:off x="457200" y="4777740"/>
-            <a:ext cx="8229600" cy="274320"/>
+            <a:off x="457200" y="4869180"/>
+            <a:ext cx="8229600" cy="182880"/>
           </a:xfrm>
           <a:prstGeom prst="rect">
             <a:avLst/>
@@ -9215,7 +9403,7 @@
             <a:pPr algn="ctr">
               <a:defRPr sz="600" i="1">
                 <a:solidFill>
-                  <a:srgbClr val="888888"/>
+                  <a:srgbClr val="999999"/>
                 </a:solidFill>
               </a:defRPr>
             </a:pPr>
@@ -10162,6 +10350,10 @@
           </a:solidFill>
           <a:ln/>
         </p:spPr>
+        <p:txBody>
+          <a:bodyPr/>
+          <a:p/>
+        </p:txBody>
       </p:sp>
       <p:sp>
         <p:nvSpPr>
@@ -10483,8 +10675,8 @@
         </p:nvSpPr>
         <p:spPr>
           <a:xfrm>
-            <a:off x="457200" y="4777740"/>
-            <a:ext cx="8229600" cy="274320"/>
+            <a:off x="457200" y="4869180"/>
+            <a:ext cx="8229600" cy="182880"/>
           </a:xfrm>
           <a:prstGeom prst="rect">
             <a:avLst/>
@@ -10500,7 +10692,7 @@
             <a:pPr algn="ctr">
               <a:defRPr sz="600" i="1">
                 <a:solidFill>
-                  <a:srgbClr val="888888"/>
+                  <a:srgbClr val="999999"/>
                 </a:solidFill>
               </a:defRPr>
             </a:pPr>
@@ -10933,8 +11125,8 @@
         </p:nvSpPr>
         <p:spPr>
           <a:xfrm>
-            <a:off x="457200" y="4777740"/>
-            <a:ext cx="8229600" cy="274320"/>
+            <a:off x="457200" y="4869180"/>
+            <a:ext cx="8229600" cy="182880"/>
           </a:xfrm>
           <a:prstGeom prst="rect">
             <a:avLst/>
@@ -10950,7 +11142,7 @@
             <a:pPr algn="ctr">
               <a:defRPr sz="600" i="1">
                 <a:solidFill>
-                  <a:srgbClr val="888888"/>
+                  <a:srgbClr val="999999"/>
                 </a:solidFill>
               </a:defRPr>
             </a:pPr>
@@ -11701,8 +11893,8 @@
         </p:nvSpPr>
         <p:spPr>
           <a:xfrm>
-            <a:off x="457200" y="4777740"/>
-            <a:ext cx="8229600" cy="274320"/>
+            <a:off x="457200" y="4869180"/>
+            <a:ext cx="8229600" cy="182880"/>
           </a:xfrm>
           <a:prstGeom prst="rect">
             <a:avLst/>
@@ -11718,7 +11910,7 @@
             <a:pPr algn="ctr">
               <a:defRPr sz="600" i="1">
                 <a:solidFill>
-                  <a:srgbClr val="888888"/>
+                  <a:srgbClr val="999999"/>
                 </a:solidFill>
               </a:defRPr>
             </a:pPr>
@@ -11880,6 +12072,10 @@
           </a:solidFill>
           <a:ln/>
         </p:spPr>
+        <p:txBody>
+          <a:bodyPr/>
+          <a:p/>
+        </p:txBody>
       </p:sp>
       <p:sp>
         <p:nvSpPr>
@@ -11900,6 +12096,10 @@
           </a:solidFill>
           <a:ln/>
         </p:spPr>
+        <p:txBody>
+          <a:bodyPr/>
+          <a:p/>
+        </p:txBody>
       </p:sp>
       <p:sp>
         <p:nvSpPr>
@@ -11951,8 +12151,8 @@
         </p:nvSpPr>
         <p:spPr>
           <a:xfrm>
-            <a:off x="457200" y="4777740"/>
-            <a:ext cx="8229600" cy="274320"/>
+            <a:off x="457200" y="4869180"/>
+            <a:ext cx="8229600" cy="182880"/>
           </a:xfrm>
           <a:prstGeom prst="rect">
             <a:avLst/>
@@ -11968,7 +12168,7 @@
             <a:pPr algn="ctr">
               <a:defRPr sz="600" i="1">
                 <a:solidFill>
-                  <a:srgbClr val="888888"/>
+                  <a:srgbClr val="999999"/>
                 </a:solidFill>
               </a:defRPr>
             </a:pPr>
@@ -12130,6 +12330,10 @@
           </a:solidFill>
           <a:ln/>
         </p:spPr>
+        <p:txBody>
+          <a:bodyPr/>
+          <a:p/>
+        </p:txBody>
       </p:sp>
       <p:sp>
         <p:nvSpPr>
@@ -12267,6 +12471,10 @@
           </a:solidFill>
           <a:ln/>
         </p:spPr>
+        <p:txBody>
+          <a:bodyPr/>
+          <a:p/>
+        </p:txBody>
       </p:sp>
       <p:sp>
         <p:nvSpPr>
@@ -12404,6 +12612,10 @@
           </a:solidFill>
           <a:ln/>
         </p:spPr>
+        <p:txBody>
+          <a:bodyPr/>
+          <a:p/>
+        </p:txBody>
       </p:sp>
       <p:sp>
         <p:nvSpPr>
@@ -12541,6 +12753,10 @@
           </a:solidFill>
           <a:ln/>
         </p:spPr>
+        <p:txBody>
+          <a:bodyPr/>
+          <a:p/>
+        </p:txBody>
       </p:sp>
       <p:sp>
         <p:nvSpPr>
@@ -12678,6 +12894,10 @@
           </a:solidFill>
           <a:ln/>
         </p:spPr>
+        <p:txBody>
+          <a:bodyPr/>
+          <a:p/>
+        </p:txBody>
       </p:sp>
       <p:sp>
         <p:nvSpPr>
@@ -12815,6 +13035,10 @@
           </a:solidFill>
           <a:ln/>
         </p:spPr>
+        <p:txBody>
+          <a:bodyPr/>
+          <a:p/>
+        </p:txBody>
       </p:sp>
       <p:sp>
         <p:nvSpPr>
@@ -12980,8 +13204,8 @@
         </p:nvSpPr>
         <p:spPr>
           <a:xfrm>
-            <a:off x="457200" y="4777740"/>
-            <a:ext cx="8229600" cy="274320"/>
+            <a:off x="457200" y="4869180"/>
+            <a:ext cx="8229600" cy="182880"/>
           </a:xfrm>
           <a:prstGeom prst="rect">
             <a:avLst/>
@@ -12997,7 +13221,7 @@
             <a:pPr algn="ctr">
               <a:defRPr sz="600" i="1">
                 <a:solidFill>
-                  <a:srgbClr val="888888"/>
+                  <a:srgbClr val="999999"/>
                 </a:solidFill>
               </a:defRPr>
             </a:pPr>
@@ -13279,6 +13503,10 @@
             <a:prstDash val="solid"/>
           </a:ln>
         </p:spPr>
+        <p:txBody>
+          <a:bodyPr/>
+          <a:p/>
+        </p:txBody>
       </p:sp>
       <p:sp>
         <p:nvSpPr>
@@ -13419,6 +13647,10 @@
             <a:prstDash val="solid"/>
           </a:ln>
         </p:spPr>
+        <p:txBody>
+          <a:bodyPr/>
+          <a:p/>
+        </p:txBody>
       </p:sp>
       <p:sp>
         <p:nvSpPr>
@@ -13559,6 +13791,10 @@
             <a:prstDash val="solid"/>
           </a:ln>
         </p:spPr>
+        <p:txBody>
+          <a:bodyPr/>
+          <a:p/>
+        </p:txBody>
       </p:sp>
       <p:sp>
         <p:nvSpPr>
@@ -13699,6 +13935,10 @@
             <a:prstDash val="solid"/>
           </a:ln>
         </p:spPr>
+        <p:txBody>
+          <a:bodyPr/>
+          <a:p/>
+        </p:txBody>
       </p:sp>
       <p:sp>
         <p:nvSpPr>
@@ -13839,6 +14079,10 @@
             <a:prstDash val="solid"/>
           </a:ln>
         </p:spPr>
+        <p:txBody>
+          <a:bodyPr/>
+          <a:p/>
+        </p:txBody>
       </p:sp>
       <p:sp>
         <p:nvSpPr>
@@ -13887,8 +14131,8 @@
         </p:nvSpPr>
         <p:spPr>
           <a:xfrm>
-            <a:off x="457200" y="4777740"/>
-            <a:ext cx="8229600" cy="274320"/>
+            <a:off x="457200" y="4869180"/>
+            <a:ext cx="8229600" cy="182880"/>
           </a:xfrm>
           <a:prstGeom prst="rect">
             <a:avLst/>
@@ -13904,7 +14148,7 @@
             <a:pPr algn="ctr">
               <a:defRPr sz="600" i="1">
                 <a:solidFill>
-                  <a:srgbClr val="888888"/>
+                  <a:srgbClr val="999999"/>
                 </a:solidFill>
               </a:defRPr>
             </a:pPr>
@@ -14066,6 +14310,10 @@
           </a:solidFill>
           <a:ln/>
         </p:spPr>
+        <p:txBody>
+          <a:bodyPr/>
+          <a:p/>
+        </p:txBody>
       </p:sp>
       <p:sp>
         <p:nvSpPr>
@@ -14086,6 +14334,10 @@
           </a:solidFill>
           <a:ln/>
         </p:spPr>
+        <p:txBody>
+          <a:bodyPr/>
+          <a:p/>
+        </p:txBody>
       </p:sp>
       <p:sp>
         <p:nvSpPr>
@@ -14179,8 +14431,8 @@
         </p:nvSpPr>
         <p:spPr>
           <a:xfrm>
-            <a:off x="457200" y="4777740"/>
-            <a:ext cx="8229600" cy="274320"/>
+            <a:off x="457200" y="4869180"/>
+            <a:ext cx="8229600" cy="182880"/>
           </a:xfrm>
           <a:prstGeom prst="rect">
             <a:avLst/>
@@ -14196,7 +14448,7 @@
             <a:pPr algn="ctr">
               <a:defRPr sz="600" i="1">
                 <a:solidFill>
-                  <a:srgbClr val="888888"/>
+                  <a:srgbClr val="999999"/>
                 </a:solidFill>
               </a:defRPr>
             </a:pPr>
@@ -14374,6 +14626,10 @@
           </a:solidFill>
           <a:ln/>
         </p:spPr>
+        <p:txBody>
+          <a:bodyPr/>
+          <a:p/>
+        </p:txBody>
       </p:sp>
       <p:sp>
         <p:nvSpPr>
@@ -14472,6 +14728,10 @@
           </a:solidFill>
           <a:ln/>
         </p:spPr>
+        <p:txBody>
+          <a:bodyPr/>
+          <a:p/>
+        </p:txBody>
       </p:sp>
       <p:sp>
         <p:nvSpPr>
@@ -14570,6 +14830,10 @@
           </a:solidFill>
           <a:ln/>
         </p:spPr>
+        <p:txBody>
+          <a:bodyPr/>
+          <a:p/>
+        </p:txBody>
       </p:sp>
       <p:sp>
         <p:nvSpPr>
@@ -14668,6 +14932,10 @@
           </a:solidFill>
           <a:ln/>
         </p:spPr>
+        <p:txBody>
+          <a:bodyPr/>
+          <a:p/>
+        </p:txBody>
       </p:sp>
       <p:sp>
         <p:nvSpPr>
@@ -14755,6 +15023,10 @@
             <a:prstDash val="solid"/>
           </a:ln>
         </p:spPr>
+        <p:txBody>
+          <a:bodyPr/>
+          <a:p/>
+        </p:txBody>
       </p:sp>
       <p:sp>
         <p:nvSpPr>
@@ -14780,6 +15052,10 @@
             <a:prstDash val="solid"/>
           </a:ln>
         </p:spPr>
+        <p:txBody>
+          <a:bodyPr/>
+          <a:p/>
+        </p:txBody>
       </p:sp>
       <p:sp>
         <p:nvSpPr>
@@ -14867,6 +15143,10 @@
             <a:prstDash val="solid"/>
           </a:ln>
         </p:spPr>
+        <p:txBody>
+          <a:bodyPr/>
+          <a:p/>
+        </p:txBody>
       </p:sp>
       <p:sp>
         <p:nvSpPr>
@@ -14887,6 +15167,10 @@
           </a:solidFill>
           <a:ln/>
         </p:spPr>
+        <p:txBody>
+          <a:bodyPr/>
+          <a:p/>
+        </p:txBody>
       </p:sp>
       <p:sp>
         <p:nvSpPr>
@@ -14960,8 +15244,8 @@
         </p:nvSpPr>
         <p:spPr>
           <a:xfrm>
-            <a:off x="457200" y="4777740"/>
-            <a:ext cx="8229600" cy="274320"/>
+            <a:off x="457200" y="4869180"/>
+            <a:ext cx="8229600" cy="182880"/>
           </a:xfrm>
           <a:prstGeom prst="rect">
             <a:avLst/>
@@ -14977,7 +15261,7 @@
             <a:pPr algn="ctr">
               <a:defRPr sz="600" i="1">
                 <a:solidFill>
-                  <a:srgbClr val="888888"/>
+                  <a:srgbClr val="999999"/>
                 </a:solidFill>
               </a:defRPr>
             </a:pPr>
@@ -15155,6 +15439,10 @@
           </a:solidFill>
           <a:ln/>
         </p:spPr>
+        <p:txBody>
+          <a:bodyPr/>
+          <a:p/>
+        </p:txBody>
       </p:sp>
       <p:sp>
         <p:nvSpPr>
@@ -15292,6 +15580,10 @@
           </a:solidFill>
           <a:ln/>
         </p:spPr>
+        <p:txBody>
+          <a:bodyPr/>
+          <a:p/>
+        </p:txBody>
       </p:sp>
       <p:sp>
         <p:nvSpPr>
@@ -15429,6 +15721,10 @@
           </a:solidFill>
           <a:ln/>
         </p:spPr>
+        <p:txBody>
+          <a:bodyPr/>
+          <a:p/>
+        </p:txBody>
       </p:sp>
       <p:sp>
         <p:nvSpPr>
@@ -15566,6 +15862,10 @@
           </a:solidFill>
           <a:ln/>
         </p:spPr>
+        <p:txBody>
+          <a:bodyPr/>
+          <a:p/>
+        </p:txBody>
       </p:sp>
       <p:sp>
         <p:nvSpPr>
@@ -15656,8 +15956,8 @@
         </p:nvSpPr>
         <p:spPr>
           <a:xfrm>
-            <a:off x="457200" y="4777740"/>
-            <a:ext cx="8229600" cy="274320"/>
+            <a:off x="457200" y="4869180"/>
+            <a:ext cx="8229600" cy="182880"/>
           </a:xfrm>
           <a:prstGeom prst="rect">
             <a:avLst/>
@@ -15673,7 +15973,7 @@
             <a:pPr algn="ctr">
               <a:defRPr sz="600" i="1">
                 <a:solidFill>
-                  <a:srgbClr val="888888"/>
+                  <a:srgbClr val="999999"/>
                 </a:solidFill>
               </a:defRPr>
             </a:pPr>

--- a/MyRhythm_Productivity_Investor_Deck_v2.pptx
+++ b/MyRhythm_Productivity_Investor_Deck_v2.pptx
@@ -2689,22 +2689,22 @@
         </p:nvSpPr>
         <p:spPr>
           <a:xfrm>
-            <a:off x="457200" y="4869180"/>
-            <a:ext cx="8229600" cy="182880"/>
-          </a:xfrm>
-          <a:prstGeom prst="rect">
-            <a:avLst/>
-          </a:prstGeom>
-          <a:noFill/>
-        </p:spPr>
-        <p:txBody>
-          <a:bodyPr wrap="square">
+            <a:off x="914400" y="4960620"/>
+            <a:ext cx="7315200" cy="137160"/>
+          </a:xfrm>
+          <a:prstGeom prst="rect">
+            <a:avLst/>
+          </a:prstGeom>
+          <a:noFill/>
+        </p:spPr>
+        <p:txBody>
+          <a:bodyPr wrap="none">
             <a:spAutoFit/>
           </a:bodyPr>
           <a:lstStyle/>
           <a:p>
             <a:pPr algn="ctr">
-              <a:defRPr sz="600" i="1">
+              <a:defRPr sz="300" i="1">
                 <a:solidFill>
                   <a:srgbClr val="999999"/>
                 </a:solidFill>
@@ -3812,22 +3812,22 @@
         </p:nvSpPr>
         <p:spPr>
           <a:xfrm>
-            <a:off x="457200" y="4869180"/>
-            <a:ext cx="8229600" cy="182880"/>
-          </a:xfrm>
-          <a:prstGeom prst="rect">
-            <a:avLst/>
-          </a:prstGeom>
-          <a:noFill/>
-        </p:spPr>
-        <p:txBody>
-          <a:bodyPr wrap="square">
+            <a:off x="914400" y="4960620"/>
+            <a:ext cx="7315200" cy="137160"/>
+          </a:xfrm>
+          <a:prstGeom prst="rect">
+            <a:avLst/>
+          </a:prstGeom>
+          <a:noFill/>
+        </p:spPr>
+        <p:txBody>
+          <a:bodyPr wrap="none">
             <a:spAutoFit/>
           </a:bodyPr>
           <a:lstStyle/>
           <a:p>
             <a:pPr algn="ctr">
-              <a:defRPr sz="600" i="1">
+              <a:defRPr sz="300" i="1">
                 <a:solidFill>
                   <a:srgbClr val="999999"/>
                 </a:solidFill>
@@ -4343,22 +4343,22 @@
         </p:nvSpPr>
         <p:spPr>
           <a:xfrm>
-            <a:off x="457200" y="4869180"/>
-            <a:ext cx="8229600" cy="182880"/>
-          </a:xfrm>
-          <a:prstGeom prst="rect">
-            <a:avLst/>
-          </a:prstGeom>
-          <a:noFill/>
-        </p:spPr>
-        <p:txBody>
-          <a:bodyPr wrap="square">
+            <a:off x="914400" y="4960620"/>
+            <a:ext cx="7315200" cy="137160"/>
+          </a:xfrm>
+          <a:prstGeom prst="rect">
+            <a:avLst/>
+          </a:prstGeom>
+          <a:noFill/>
+        </p:spPr>
+        <p:txBody>
+          <a:bodyPr wrap="none">
             <a:spAutoFit/>
           </a:bodyPr>
           <a:lstStyle/>
           <a:p>
             <a:pPr algn="ctr">
-              <a:defRPr sz="600" i="1">
+              <a:defRPr sz="300" i="1">
                 <a:solidFill>
                   <a:srgbClr val="999999"/>
                 </a:solidFill>
@@ -4850,22 +4850,22 @@
         </p:nvSpPr>
         <p:spPr>
           <a:xfrm>
-            <a:off x="457200" y="4869180"/>
-            <a:ext cx="8229600" cy="182880"/>
-          </a:xfrm>
-          <a:prstGeom prst="rect">
-            <a:avLst/>
-          </a:prstGeom>
-          <a:noFill/>
-        </p:spPr>
-        <p:txBody>
-          <a:bodyPr wrap="square">
+            <a:off x="914400" y="4960620"/>
+            <a:ext cx="7315200" cy="137160"/>
+          </a:xfrm>
+          <a:prstGeom prst="rect">
+            <a:avLst/>
+          </a:prstGeom>
+          <a:noFill/>
+        </p:spPr>
+        <p:txBody>
+          <a:bodyPr wrap="none">
             <a:spAutoFit/>
           </a:bodyPr>
           <a:lstStyle/>
           <a:p>
             <a:pPr algn="ctr">
-              <a:defRPr sz="600" i="1">
+              <a:defRPr sz="300" i="1">
                 <a:solidFill>
                   <a:srgbClr val="999999"/>
                 </a:solidFill>
@@ -5825,22 +5825,22 @@
         </p:nvSpPr>
         <p:spPr>
           <a:xfrm>
-            <a:off x="457200" y="4869180"/>
-            <a:ext cx="8229600" cy="182880"/>
-          </a:xfrm>
-          <a:prstGeom prst="rect">
-            <a:avLst/>
-          </a:prstGeom>
-          <a:noFill/>
-        </p:spPr>
-        <p:txBody>
-          <a:bodyPr wrap="square">
+            <a:off x="914400" y="4960620"/>
+            <a:ext cx="7315200" cy="137160"/>
+          </a:xfrm>
+          <a:prstGeom prst="rect">
+            <a:avLst/>
+          </a:prstGeom>
+          <a:noFill/>
+        </p:spPr>
+        <p:txBody>
+          <a:bodyPr wrap="none">
             <a:spAutoFit/>
           </a:bodyPr>
           <a:lstStyle/>
           <a:p>
             <a:pPr algn="ctr">
-              <a:defRPr sz="600" i="1">
+              <a:defRPr sz="300" i="1">
                 <a:solidFill>
                   <a:srgbClr val="999999"/>
                 </a:solidFill>
@@ -6729,22 +6729,22 @@
         </p:nvSpPr>
         <p:spPr>
           <a:xfrm>
-            <a:off x="457200" y="4869180"/>
-            <a:ext cx="8229600" cy="182880"/>
-          </a:xfrm>
-          <a:prstGeom prst="rect">
-            <a:avLst/>
-          </a:prstGeom>
-          <a:noFill/>
-        </p:spPr>
-        <p:txBody>
-          <a:bodyPr wrap="square">
+            <a:off x="914400" y="4960620"/>
+            <a:ext cx="7315200" cy="137160"/>
+          </a:xfrm>
+          <a:prstGeom prst="rect">
+            <a:avLst/>
+          </a:prstGeom>
+          <a:noFill/>
+        </p:spPr>
+        <p:txBody>
+          <a:bodyPr wrap="none">
             <a:spAutoFit/>
           </a:bodyPr>
           <a:lstStyle/>
           <a:p>
             <a:pPr algn="ctr">
-              <a:defRPr sz="600" i="1">
+              <a:defRPr sz="300" i="1">
                 <a:solidFill>
                   <a:srgbClr val="999999"/>
                 </a:solidFill>
@@ -7639,22 +7639,22 @@
         </p:nvSpPr>
         <p:spPr>
           <a:xfrm>
-            <a:off x="457200" y="4869180"/>
-            <a:ext cx="8229600" cy="182880"/>
-          </a:xfrm>
-          <a:prstGeom prst="rect">
-            <a:avLst/>
-          </a:prstGeom>
-          <a:noFill/>
-        </p:spPr>
-        <p:txBody>
-          <a:bodyPr wrap="square">
+            <a:off x="914400" y="4960620"/>
+            <a:ext cx="7315200" cy="137160"/>
+          </a:xfrm>
+          <a:prstGeom prst="rect">
+            <a:avLst/>
+          </a:prstGeom>
+          <a:noFill/>
+        </p:spPr>
+        <p:txBody>
+          <a:bodyPr wrap="none">
             <a:spAutoFit/>
           </a:bodyPr>
           <a:lstStyle/>
           <a:p>
             <a:pPr algn="ctr">
-              <a:defRPr sz="600" i="1">
+              <a:defRPr sz="300" i="1">
                 <a:solidFill>
                   <a:srgbClr val="999999"/>
                 </a:solidFill>
@@ -8834,22 +8834,22 @@
         </p:nvSpPr>
         <p:spPr>
           <a:xfrm>
-            <a:off x="457200" y="4869180"/>
-            <a:ext cx="8229600" cy="182880"/>
-          </a:xfrm>
-          <a:prstGeom prst="rect">
-            <a:avLst/>
-          </a:prstGeom>
-          <a:noFill/>
-        </p:spPr>
-        <p:txBody>
-          <a:bodyPr wrap="square">
+            <a:off x="914400" y="4960620"/>
+            <a:ext cx="7315200" cy="137160"/>
+          </a:xfrm>
+          <a:prstGeom prst="rect">
+            <a:avLst/>
+          </a:prstGeom>
+          <a:noFill/>
+        </p:spPr>
+        <p:txBody>
+          <a:bodyPr wrap="none">
             <a:spAutoFit/>
           </a:bodyPr>
           <a:lstStyle/>
           <a:p>
             <a:pPr algn="ctr">
-              <a:defRPr sz="600" i="1">
+              <a:defRPr sz="300" i="1">
                 <a:solidFill>
                   <a:srgbClr val="999999"/>
                 </a:solidFill>
@@ -9386,22 +9386,22 @@
         </p:nvSpPr>
         <p:spPr>
           <a:xfrm>
-            <a:off x="457200" y="4869180"/>
-            <a:ext cx="8229600" cy="182880"/>
-          </a:xfrm>
-          <a:prstGeom prst="rect">
-            <a:avLst/>
-          </a:prstGeom>
-          <a:noFill/>
-        </p:spPr>
-        <p:txBody>
-          <a:bodyPr wrap="square">
+            <a:off x="914400" y="4960620"/>
+            <a:ext cx="7315200" cy="137160"/>
+          </a:xfrm>
+          <a:prstGeom prst="rect">
+            <a:avLst/>
+          </a:prstGeom>
+          <a:noFill/>
+        </p:spPr>
+        <p:txBody>
+          <a:bodyPr wrap="none">
             <a:spAutoFit/>
           </a:bodyPr>
           <a:lstStyle/>
           <a:p>
             <a:pPr algn="ctr">
-              <a:defRPr sz="600" i="1">
+              <a:defRPr sz="300" i="1">
                 <a:solidFill>
                   <a:srgbClr val="999999"/>
                 </a:solidFill>
@@ -10675,22 +10675,22 @@
         </p:nvSpPr>
         <p:spPr>
           <a:xfrm>
-            <a:off x="457200" y="4869180"/>
-            <a:ext cx="8229600" cy="182880"/>
-          </a:xfrm>
-          <a:prstGeom prst="rect">
-            <a:avLst/>
-          </a:prstGeom>
-          <a:noFill/>
-        </p:spPr>
-        <p:txBody>
-          <a:bodyPr wrap="square">
+            <a:off x="914400" y="4960620"/>
+            <a:ext cx="7315200" cy="137160"/>
+          </a:xfrm>
+          <a:prstGeom prst="rect">
+            <a:avLst/>
+          </a:prstGeom>
+          <a:noFill/>
+        </p:spPr>
+        <p:txBody>
+          <a:bodyPr wrap="none">
             <a:spAutoFit/>
           </a:bodyPr>
           <a:lstStyle/>
           <a:p>
             <a:pPr algn="ctr">
-              <a:defRPr sz="600" i="1">
+              <a:defRPr sz="300" i="1">
                 <a:solidFill>
                   <a:srgbClr val="999999"/>
                 </a:solidFill>
@@ -11125,22 +11125,22 @@
         </p:nvSpPr>
         <p:spPr>
           <a:xfrm>
-            <a:off x="457200" y="4869180"/>
-            <a:ext cx="8229600" cy="182880"/>
-          </a:xfrm>
-          <a:prstGeom prst="rect">
-            <a:avLst/>
-          </a:prstGeom>
-          <a:noFill/>
-        </p:spPr>
-        <p:txBody>
-          <a:bodyPr wrap="square">
+            <a:off x="914400" y="4960620"/>
+            <a:ext cx="7315200" cy="137160"/>
+          </a:xfrm>
+          <a:prstGeom prst="rect">
+            <a:avLst/>
+          </a:prstGeom>
+          <a:noFill/>
+        </p:spPr>
+        <p:txBody>
+          <a:bodyPr wrap="none">
             <a:spAutoFit/>
           </a:bodyPr>
           <a:lstStyle/>
           <a:p>
             <a:pPr algn="ctr">
-              <a:defRPr sz="600" i="1">
+              <a:defRPr sz="300" i="1">
                 <a:solidFill>
                   <a:srgbClr val="999999"/>
                 </a:solidFill>
@@ -11893,22 +11893,22 @@
         </p:nvSpPr>
         <p:spPr>
           <a:xfrm>
-            <a:off x="457200" y="4869180"/>
-            <a:ext cx="8229600" cy="182880"/>
-          </a:xfrm>
-          <a:prstGeom prst="rect">
-            <a:avLst/>
-          </a:prstGeom>
-          <a:noFill/>
-        </p:spPr>
-        <p:txBody>
-          <a:bodyPr wrap="square">
+            <a:off x="914400" y="4960620"/>
+            <a:ext cx="7315200" cy="137160"/>
+          </a:xfrm>
+          <a:prstGeom prst="rect">
+            <a:avLst/>
+          </a:prstGeom>
+          <a:noFill/>
+        </p:spPr>
+        <p:txBody>
+          <a:bodyPr wrap="none">
             <a:spAutoFit/>
           </a:bodyPr>
           <a:lstStyle/>
           <a:p>
             <a:pPr algn="ctr">
-              <a:defRPr sz="600" i="1">
+              <a:defRPr sz="300" i="1">
                 <a:solidFill>
                   <a:srgbClr val="999999"/>
                 </a:solidFill>
@@ -12151,22 +12151,22 @@
         </p:nvSpPr>
         <p:spPr>
           <a:xfrm>
-            <a:off x="457200" y="4869180"/>
-            <a:ext cx="8229600" cy="182880"/>
-          </a:xfrm>
-          <a:prstGeom prst="rect">
-            <a:avLst/>
-          </a:prstGeom>
-          <a:noFill/>
-        </p:spPr>
-        <p:txBody>
-          <a:bodyPr wrap="square">
+            <a:off x="914400" y="4960620"/>
+            <a:ext cx="7315200" cy="137160"/>
+          </a:xfrm>
+          <a:prstGeom prst="rect">
+            <a:avLst/>
+          </a:prstGeom>
+          <a:noFill/>
+        </p:spPr>
+        <p:txBody>
+          <a:bodyPr wrap="none">
             <a:spAutoFit/>
           </a:bodyPr>
           <a:lstStyle/>
           <a:p>
             <a:pPr algn="ctr">
-              <a:defRPr sz="600" i="1">
+              <a:defRPr sz="300" i="1">
                 <a:solidFill>
                   <a:srgbClr val="999999"/>
                 </a:solidFill>
@@ -13204,22 +13204,22 @@
         </p:nvSpPr>
         <p:spPr>
           <a:xfrm>
-            <a:off x="457200" y="4869180"/>
-            <a:ext cx="8229600" cy="182880"/>
-          </a:xfrm>
-          <a:prstGeom prst="rect">
-            <a:avLst/>
-          </a:prstGeom>
-          <a:noFill/>
-        </p:spPr>
-        <p:txBody>
-          <a:bodyPr wrap="square">
+            <a:off x="914400" y="4960620"/>
+            <a:ext cx="7315200" cy="137160"/>
+          </a:xfrm>
+          <a:prstGeom prst="rect">
+            <a:avLst/>
+          </a:prstGeom>
+          <a:noFill/>
+        </p:spPr>
+        <p:txBody>
+          <a:bodyPr wrap="none">
             <a:spAutoFit/>
           </a:bodyPr>
           <a:lstStyle/>
           <a:p>
             <a:pPr algn="ctr">
-              <a:defRPr sz="600" i="1">
+              <a:defRPr sz="300" i="1">
                 <a:solidFill>
                   <a:srgbClr val="999999"/>
                 </a:solidFill>
@@ -14131,22 +14131,22 @@
         </p:nvSpPr>
         <p:spPr>
           <a:xfrm>
-            <a:off x="457200" y="4869180"/>
-            <a:ext cx="8229600" cy="182880"/>
-          </a:xfrm>
-          <a:prstGeom prst="rect">
-            <a:avLst/>
-          </a:prstGeom>
-          <a:noFill/>
-        </p:spPr>
-        <p:txBody>
-          <a:bodyPr wrap="square">
+            <a:off x="914400" y="4960620"/>
+            <a:ext cx="7315200" cy="137160"/>
+          </a:xfrm>
+          <a:prstGeom prst="rect">
+            <a:avLst/>
+          </a:prstGeom>
+          <a:noFill/>
+        </p:spPr>
+        <p:txBody>
+          <a:bodyPr wrap="none">
             <a:spAutoFit/>
           </a:bodyPr>
           <a:lstStyle/>
           <a:p>
             <a:pPr algn="ctr">
-              <a:defRPr sz="600" i="1">
+              <a:defRPr sz="300" i="1">
                 <a:solidFill>
                   <a:srgbClr val="999999"/>
                 </a:solidFill>
@@ -14431,22 +14431,22 @@
         </p:nvSpPr>
         <p:spPr>
           <a:xfrm>
-            <a:off x="457200" y="4869180"/>
-            <a:ext cx="8229600" cy="182880"/>
-          </a:xfrm>
-          <a:prstGeom prst="rect">
-            <a:avLst/>
-          </a:prstGeom>
-          <a:noFill/>
-        </p:spPr>
-        <p:txBody>
-          <a:bodyPr wrap="square">
+            <a:off x="914400" y="4960620"/>
+            <a:ext cx="7315200" cy="137160"/>
+          </a:xfrm>
+          <a:prstGeom prst="rect">
+            <a:avLst/>
+          </a:prstGeom>
+          <a:noFill/>
+        </p:spPr>
+        <p:txBody>
+          <a:bodyPr wrap="none">
             <a:spAutoFit/>
           </a:bodyPr>
           <a:lstStyle/>
           <a:p>
             <a:pPr algn="ctr">
-              <a:defRPr sz="600" i="1">
+              <a:defRPr sz="300" i="1">
                 <a:solidFill>
                   <a:srgbClr val="999999"/>
                 </a:solidFill>
@@ -15244,22 +15244,22 @@
         </p:nvSpPr>
         <p:spPr>
           <a:xfrm>
-            <a:off x="457200" y="4869180"/>
-            <a:ext cx="8229600" cy="182880"/>
-          </a:xfrm>
-          <a:prstGeom prst="rect">
-            <a:avLst/>
-          </a:prstGeom>
-          <a:noFill/>
-        </p:spPr>
-        <p:txBody>
-          <a:bodyPr wrap="square">
+            <a:off x="914400" y="4960620"/>
+            <a:ext cx="7315200" cy="137160"/>
+          </a:xfrm>
+          <a:prstGeom prst="rect">
+            <a:avLst/>
+          </a:prstGeom>
+          <a:noFill/>
+        </p:spPr>
+        <p:txBody>
+          <a:bodyPr wrap="none">
             <a:spAutoFit/>
           </a:bodyPr>
           <a:lstStyle/>
           <a:p>
             <a:pPr algn="ctr">
-              <a:defRPr sz="600" i="1">
+              <a:defRPr sz="300" i="1">
                 <a:solidFill>
                   <a:srgbClr val="999999"/>
                 </a:solidFill>
@@ -15956,22 +15956,22 @@
         </p:nvSpPr>
         <p:spPr>
           <a:xfrm>
-            <a:off x="457200" y="4869180"/>
-            <a:ext cx="8229600" cy="182880"/>
-          </a:xfrm>
-          <a:prstGeom prst="rect">
-            <a:avLst/>
-          </a:prstGeom>
-          <a:noFill/>
-        </p:spPr>
-        <p:txBody>
-          <a:bodyPr wrap="square">
+            <a:off x="914400" y="4960620"/>
+            <a:ext cx="7315200" cy="137160"/>
+          </a:xfrm>
+          <a:prstGeom prst="rect">
+            <a:avLst/>
+          </a:prstGeom>
+          <a:noFill/>
+        </p:spPr>
+        <p:txBody>
+          <a:bodyPr wrap="none">
             <a:spAutoFit/>
           </a:bodyPr>
           <a:lstStyle/>
           <a:p>
             <a:pPr algn="ctr">
-              <a:defRPr sz="600" i="1">
+              <a:defRPr sz="300" i="1">
                 <a:solidFill>
                   <a:srgbClr val="999999"/>
                 </a:solidFill>
